--- a/docs/weibo-vis/templates/20260910_行政_WEIBO新品簡報模板_v2.pptx
+++ b/docs/weibo-vis/templates/20260910_行政_WEIBO新品簡報模板_v2.pptx
@@ -2333,7 +2333,7 @@
         <p:spPr>
           <a:xfrm>
             <a:off x="548640" y="6035040"/>
-            <a:ext cx="1645920" cy="274320"/>
+            <a:ext cx="1179576" cy="274320"/>
           </a:xfrm>
           <a:prstGeom prst="rect">
             <a:avLst/>
@@ -3470,7 +3470,7 @@
         <p:spPr>
           <a:xfrm>
             <a:off x="548640" y="6035040"/>
-            <a:ext cx="1645920" cy="274320"/>
+            <a:ext cx="1179576" cy="274320"/>
           </a:xfrm>
           <a:prstGeom prst="rect">
             <a:avLst/>
@@ -4516,7 +4516,7 @@
         <p:spPr>
           <a:xfrm>
             <a:off x="548640" y="6035040"/>
-            <a:ext cx="1645920" cy="274320"/>
+            <a:ext cx="1179576" cy="274320"/>
           </a:xfrm>
           <a:prstGeom prst="rect">
             <a:avLst/>
@@ -5331,7 +5331,7 @@
         <p:spPr>
           <a:xfrm>
             <a:off x="548640" y="6035040"/>
-            <a:ext cx="1645920" cy="274320"/>
+            <a:ext cx="1179576" cy="274320"/>
           </a:xfrm>
           <a:prstGeom prst="rect">
             <a:avLst/>
@@ -7559,7 +7559,7 @@
         <p:spPr>
           <a:xfrm>
             <a:off x="548640" y="6035040"/>
-            <a:ext cx="1645920" cy="274320"/>
+            <a:ext cx="1179576" cy="274320"/>
           </a:xfrm>
           <a:prstGeom prst="rect">
             <a:avLst/>
@@ -9826,7 +9826,7 @@
         <p:spPr>
           <a:xfrm>
             <a:off x="548640" y="6035040"/>
-            <a:ext cx="1645920" cy="274320"/>
+            <a:ext cx="1179576" cy="274320"/>
           </a:xfrm>
           <a:prstGeom prst="rect">
             <a:avLst/>
@@ -10859,7 +10859,7 @@
         <p:spPr>
           <a:xfrm>
             <a:off x="548640" y="6035040"/>
-            <a:ext cx="1645920" cy="274320"/>
+            <a:ext cx="1179576" cy="274320"/>
           </a:xfrm>
           <a:prstGeom prst="rect">
             <a:avLst/>
@@ -11624,7 +11624,7 @@
         <p:spPr>
           <a:xfrm>
             <a:off x="548640" y="6035040"/>
-            <a:ext cx="1645920" cy="274320"/>
+            <a:ext cx="1179576" cy="274320"/>
           </a:xfrm>
           <a:prstGeom prst="rect">
             <a:avLst/>
